--- a/courses/learn_floorplanning/module01-03-area-deadspace/slides.pptx
+++ b/courses/learn_floorplanning/module01-03-area-deadspace/slides.pptx
@@ -15,6 +15,9 @@
     <p:sldId id="263" r:id="rId15"/>
     <p:sldId id="264" r:id="rId16"/>
     <p:sldId id="265" r:id="rId17"/>
+    <p:sldId id="266" r:id="rId18"/>
+    <p:sldId id="267" r:id="rId19"/>
+    <p:sldId id="268" r:id="rId20"/>
   </p:sldIdLst>
   <p:sldSz cx="12191695" cy="6858000" type="screen4x3"/>
   <p:notesSz cx="6858000" cy="9144000"/>
@@ -514,12 +517,6 @@
               <a:t>With a legal packing in hand, score the whitespace. Module areas sum to twenty-three; the outline is eighty; deadspace is fifty-seven; density is zero point two eight seven five.</a:t>
             </a:r>
           </a:p>
-          <a:p/>
-          <a:p>
-            <a:r>
-              <a:t>&lt;!-- algorithm-walkthrough --&gt;</a:t>
-            </a:r>
-          </a:p>
         </p:txBody>
       </p:sp>
       <p:sp>
@@ -587,6 +584,146 @@
           <a:lstStyle/>
           <a:p>
             <a:r>
+              <a:t>Implement moduleAreaSum, outlineArea, deadspace, and density. Assert deadspace equals eighty minus twenty-three on the starter modules—independent of placement when sizes are fixed.</a:t>
+            </a:r>
+          </a:p>
+        </p:txBody>
+      </p:sp>
+      <p:sp>
+        <p:nvSpPr>
+          <p:cNvPr id="4" name="Slide Number Placeholder 3"/>
+          <p:cNvSpPr>
+            <a:spLocks noGrp="1"/>
+          </p:cNvSpPr>
+          <p:nvPr>
+            <p:ph type="sldNum" idx="5" sz="quarter"/>
+          </p:nvPr>
+        </p:nvSpPr>
+        <p:spPr/>
+      </p:sp>
+    </p:spTree>
+  </p:cSld>
+  <p:clrMapOvr>
+    <a:masterClrMapping/>
+  </p:clrMapOvr>
+</p:notes>
+</file>
+
+<file path=ppt/notesSlides/notesSlide11.xml><?xml version="1.0" encoding="utf-8"?>
+<p:notes xmlns:a="http://schemas.openxmlformats.org/drawingml/2006/main" xmlns:p="http://schemas.openxmlformats.org/presentationml/2006/main" xmlns:r="http://schemas.openxmlformats.org/officeDocument/2006/relationships">
+  <p:cSld>
+    <p:spTree>
+      <p:nvGrpSpPr>
+        <p:cNvPr id="1" name=""/>
+        <p:cNvGrpSpPr/>
+        <p:nvPr/>
+      </p:nvGrpSpPr>
+      <p:grpSpPr>
+        <a:xfrm>
+          <a:off x="0" y="0"/>
+          <a:ext cx="0" cy="0"/>
+          <a:chOff x="0" y="0"/>
+          <a:chExt cx="0" cy="0"/>
+        </a:xfrm>
+      </p:grpSpPr>
+      <p:sp>
+        <p:nvSpPr>
+          <p:cNvPr id="2" name="Slide Image Placeholder 1"/>
+          <p:cNvSpPr>
+            <a:spLocks noGrp="1"/>
+          </p:cNvSpPr>
+          <p:nvPr>
+            <p:ph type="sldImg" idx="2"/>
+          </p:nvPr>
+        </p:nvSpPr>
+        <p:spPr/>
+      </p:sp>
+      <p:sp>
+        <p:nvSpPr>
+          <p:cNvPr id="3" name="Notes Placeholder 2"/>
+          <p:cNvSpPr>
+            <a:spLocks noGrp="1"/>
+          </p:cNvSpPr>
+          <p:nvPr>
+            <p:ph type="body" idx="3" sz="quarter"/>
+          </p:nvPr>
+        </p:nvSpPr>
+        <p:spPr/>
+        <p:txBody>
+          <a:bodyPr/>
+          <a:lstStyle/>
+          <a:p>
+            <a:r>
+              <a:t>Reporting density on an illegal pack; mixing outline area with bounding-box area; forgetting soft A still contributes area six at three by two.</a:t>
+            </a:r>
+          </a:p>
+        </p:txBody>
+      </p:sp>
+      <p:sp>
+        <p:nvSpPr>
+          <p:cNvPr id="4" name="Slide Number Placeholder 3"/>
+          <p:cNvSpPr>
+            <a:spLocks noGrp="1"/>
+          </p:cNvSpPr>
+          <p:nvPr>
+            <p:ph type="sldNum" idx="5" sz="quarter"/>
+          </p:nvPr>
+        </p:nvSpPr>
+        <p:spPr/>
+      </p:sp>
+    </p:spTree>
+  </p:cSld>
+  <p:clrMapOvr>
+    <a:masterClrMapping/>
+  </p:clrMapOvr>
+</p:notes>
+</file>
+
+<file path=ppt/notesSlides/notesSlide12.xml><?xml version="1.0" encoding="utf-8"?>
+<p:notes xmlns:a="http://schemas.openxmlformats.org/drawingml/2006/main" xmlns:p="http://schemas.openxmlformats.org/presentationml/2006/main" xmlns:r="http://schemas.openxmlformats.org/officeDocument/2006/relationships">
+  <p:cSld>
+    <p:spTree>
+      <p:nvGrpSpPr>
+        <p:cNvPr id="1" name=""/>
+        <p:cNvGrpSpPr/>
+        <p:nvPr/>
+      </p:nvGrpSpPr>
+      <p:grpSpPr>
+        <a:xfrm>
+          <a:off x="0" y="0"/>
+          <a:ext cx="0" cy="0"/>
+          <a:chOff x="0" y="0"/>
+          <a:chExt cx="0" cy="0"/>
+        </a:xfrm>
+      </p:grpSpPr>
+      <p:sp>
+        <p:nvSpPr>
+          <p:cNvPr id="2" name="Slide Image Placeholder 1"/>
+          <p:cNvSpPr>
+            <a:spLocks noGrp="1"/>
+          </p:cNvSpPr>
+          <p:nvPr>
+            <p:ph type="sldImg" idx="2"/>
+          </p:nvPr>
+        </p:nvSpPr>
+        <p:spPr/>
+      </p:sp>
+      <p:sp>
+        <p:nvSpPr>
+          <p:cNvPr id="3" name="Notes Placeholder 2"/>
+          <p:cNvSpPr>
+            <a:spLocks noGrp="1"/>
+          </p:cNvSpPr>
+          <p:nvPr>
+            <p:ph type="body" idx="3" sz="quarter"/>
+          </p:nvPr>
+        </p:nvSpPr>
+        <p:spPr/>
+        <p:txBody>
+          <a:bodyPr/>
+          <a:lstStyle/>
+          <a:p>
+            <a:r>
               <a:t>Print the area trio on every run. Next lab builds a slicing polish whose bounding box is nine by three inside this outline.</a:t>
             </a:r>
           </a:p>
@@ -657,7 +794,13 @@
           <a:lstStyle/>
           <a:p>
             <a:r>
-              <a:t>Add the five module areas: A is six, B is six, C is four, D is three, E is four. That is twenty-three units of silicon that must fit in the outline.</a:t>
+              <a:t>Deadspace pseudocode is arithmetic after legality. Sum module areas, subtract from outline area, and divide for density.</a:t>
+            </a:r>
+          </a:p>
+          <a:p/>
+          <a:p>
+            <a:r>
+              <a:t>Open this module's examples file and find the Pseudocode section. That written sketch is what you implement on the implement track and what the browser challenges measure.</a:t>
             </a:r>
           </a:p>
         </p:txBody>
@@ -727,7 +870,7 @@
           <a:lstStyle/>
           <a:p>
             <a:r>
-              <a:t>Ten times eight is eighty. That is the budget. Module area twenty-three leaves whitespace—deadspace—equal to fifty-seven.</a:t>
+              <a:t>On the golden packing area is twenty-three, outline eighty, deadspace fifty-seven, density about zero point two eight seven five. Do not celebrate density on illegal packs.</a:t>
             </a:r>
           </a:p>
         </p:txBody>
@@ -797,7 +940,7 @@
           <a:lstStyle/>
           <a:p>
             <a:r>
-              <a:t>Density is module area over outline area: twenty-three over eighty equals zero point two eight seven five. Whitespace fraction is zero point seven one two five.</a:t>
+              <a:t>Add the five module areas: A is six, B is six, C is four, D is three, E is four. That is twenty-three units of silicon that must fit in the outline.</a:t>
             </a:r>
           </a:p>
         </p:txBody>
@@ -867,7 +1010,7 @@
           <a:lstStyle/>
           <a:p>
             <a:r>
-              <a:t>On the golden legal packing these numbers are honest. On an overflow packing the area math still computes, but the floorplan is invalid—do not celebrate density on illegal layouts.</a:t>
+              <a:t>Ten times eight is eighty. That is the budget. Module area twenty-three leaves whitespace—deadspace—equal to fifty-seven.</a:t>
             </a:r>
           </a:p>
         </p:txBody>
@@ -937,13 +1080,7 @@
           <a:lstStyle/>
           <a:p>
             <a:r>
-              <a:t>Habit: print module area, outline area, deadspace, and density with every packing. Representations later change geometry; this trio stays the scoreboard.</a:t>
-            </a:r>
-          </a:p>
-          <a:p/>
-          <a:p>
-            <a:r>
-              <a:t>&lt;!-- /algorithm-walkthrough --&gt;</a:t>
+              <a:t>Density is module area over outline area: twenty-three over eighty equals zero point two eight seven five. Whitespace fraction is zero point seven one two five.</a:t>
             </a:r>
           </a:p>
         </p:txBody>
@@ -1013,7 +1150,7 @@
           <a:lstStyle/>
           <a:p>
             <a:r>
-              <a:t>Open area-deadspace, load the golden packing, and read the metrics panel: module area twenty-three, outline eighty, deadspace fifty-seven, density zero point two eight seven five.</a:t>
+              <a:t>On the golden legal packing these numbers are honest. On an overflow packing the area math still computes, but the floorplan is invalid—do not celebrate density on illegal layouts.</a:t>
             </a:r>
           </a:p>
         </p:txBody>
@@ -1083,7 +1220,7 @@
           <a:lstStyle/>
           <a:p>
             <a:r>
-              <a:t>Implement moduleAreaSum, outlineArea, deadspace, and density. Assert deadspace equals eighty minus twenty-three on the starter modules—independent of placement when sizes are fixed.</a:t>
+              <a:t>Habit: print module area, outline area, deadspace, and density with every packing. Representations later change geometry; this trio stays the scoreboard.</a:t>
             </a:r>
           </a:p>
         </p:txBody>
@@ -1153,7 +1290,7 @@
           <a:lstStyle/>
           <a:p>
             <a:r>
-              <a:t>Reporting density on an illegal pack; mixing outline area with bounding-box area; forgetting soft A still contributes area six at three by two.</a:t>
+              <a:t>Open area-deadspace, load the golden packing, and read the metrics panel: module area twenty-three, outline eighty, deadspace fifty-seven, density zero point two eight seven five.</a:t>
             </a:r>
           </a:p>
         </p:txBody>
@@ -4311,6 +4448,451 @@
                 </a:solidFill>
                 <a:latin typeface="Calibri"/>
               </a:rPr>
+              <a:t>Browser lab track</a:t>
+            </a:r>
+          </a:p>
+        </p:txBody>
+      </p:sp>
+      <p:sp>
+        <p:nvSpPr>
+          <p:cNvPr id="3" name="TextBox 2"/>
+          <p:cNvSpPr txBox="1"/>
+          <p:nvPr/>
+        </p:nvSpPr>
+        <p:spPr>
+          <a:xfrm>
+            <a:off x="548640" y="1234440"/>
+            <a:ext cx="11064240" cy="4937760"/>
+          </a:xfrm>
+          <a:prstGeom prst="rect">
+            <a:avLst/>
+          </a:prstGeom>
+          <a:noFill/>
+        </p:spPr>
+        <p:txBody>
+          <a:bodyPr wrap="square">
+            <a:noAutofit/>
+          </a:bodyPr>
+          <a:lstStyle/>
+          <a:p>
+            <a:pPr lvl="0" marL="457200" indent="-228600">
+              <a:buFont typeface="Calibri"/>
+              <a:spcAft>
+                <a:spcPts val="1000"/>
+              </a:spcAft>
+              <a:buSzPct val="100000"/>
+              <a:buChar char="•"/>
+              <a:lnSpc>
+                <a:spcPts val="2200"/>
+              </a:lnSpc>
+            </a:pPr>
+            <a:r>
+              <a:rPr sz="2000" b="0">
+                <a:solidFill>
+                  <a:srgbClr val="333333"/>
+                </a:solidFill>
+                <a:latin typeface="Calibri"/>
+              </a:rPr>
+              <a:t>Open area-deadspace, load the golden packing, and read the metrics panel</a:t>
+            </a:r>
+          </a:p>
+        </p:txBody>
+      </p:sp>
+      <p:sp>
+        <p:nvSpPr>
+          <p:cNvPr id="4" name="TextBox 3"/>
+          <p:cNvSpPr txBox="1"/>
+          <p:nvPr/>
+        </p:nvSpPr>
+        <p:spPr>
+          <a:xfrm>
+            <a:off x="548640" y="6355080"/>
+            <a:ext cx="11064240" cy="320040"/>
+          </a:xfrm>
+          <a:prstGeom prst="rect">
+            <a:avLst/>
+          </a:prstGeom>
+          <a:noFill/>
+        </p:spPr>
+        <p:txBody>
+          <a:bodyPr wrap="square">
+            <a:noAutofit/>
+          </a:bodyPr>
+          <a:lstStyle/>
+          <a:p>
+            <a:pPr algn="r">
+              <a:lnSpc>
+                <a:spcPts val="2200"/>
+              </a:lnSpc>
+              <a:defRPr sz="1000" b="0">
+                <a:solidFill>
+                  <a:srgbClr val="666666"/>
+                </a:solidFill>
+                <a:latin typeface="Calibri"/>
+              </a:defRPr>
+            </a:pPr>
+            <a:r>
+              <a:t>learn_floorplanning — 03 area deadspace</a:t>
+            </a:r>
+          </a:p>
+        </p:txBody>
+      </p:sp>
+    </p:spTree>
+  </p:cSld>
+  <p:clrMapOvr>
+    <a:masterClrMapping/>
+  </p:clrMapOvr>
+</p:sld>
+</file>
+
+<file path=ppt/slides/slide11.xml><?xml version="1.0" encoding="utf-8"?>
+<p:sld xmlns:a="http://schemas.openxmlformats.org/drawingml/2006/main" xmlns:p="http://schemas.openxmlformats.org/presentationml/2006/main" xmlns:r="http://schemas.openxmlformats.org/officeDocument/2006/relationships">
+  <p:cSld>
+    <p:spTree>
+      <p:nvGrpSpPr>
+        <p:cNvPr id="1" name=""/>
+        <p:cNvGrpSpPr/>
+        <p:nvPr/>
+      </p:nvGrpSpPr>
+      <p:grpSpPr/>
+      <p:sp>
+        <p:nvSpPr>
+          <p:cNvPr id="2" name="TextBox 1"/>
+          <p:cNvSpPr txBox="1"/>
+          <p:nvPr/>
+        </p:nvSpPr>
+        <p:spPr>
+          <a:xfrm>
+            <a:off x="548640" y="411480"/>
+            <a:ext cx="11064240" cy="777240"/>
+          </a:xfrm>
+          <a:prstGeom prst="rect">
+            <a:avLst/>
+          </a:prstGeom>
+          <a:noFill/>
+        </p:spPr>
+        <p:txBody>
+          <a:bodyPr wrap="square">
+            <a:noAutofit/>
+          </a:bodyPr>
+          <a:lstStyle/>
+          <a:p>
+            <a:pPr>
+              <a:lnSpc>
+                <a:spcPts val="2200"/>
+              </a:lnSpc>
+            </a:pPr>
+            <a:r>
+              <a:rPr sz="2800" b="1">
+                <a:solidFill>
+                  <a:srgbClr val="1A1A2E"/>
+                </a:solidFill>
+                <a:latin typeface="Calibri"/>
+              </a:rPr>
+              <a:t>Implement track</a:t>
+            </a:r>
+          </a:p>
+        </p:txBody>
+      </p:sp>
+      <p:sp>
+        <p:nvSpPr>
+          <p:cNvPr id="3" name="TextBox 2"/>
+          <p:cNvSpPr txBox="1"/>
+          <p:nvPr/>
+        </p:nvSpPr>
+        <p:spPr>
+          <a:xfrm>
+            <a:off x="548640" y="1234440"/>
+            <a:ext cx="11064240" cy="4937760"/>
+          </a:xfrm>
+          <a:prstGeom prst="rect">
+            <a:avLst/>
+          </a:prstGeom>
+          <a:noFill/>
+        </p:spPr>
+        <p:txBody>
+          <a:bodyPr wrap="square">
+            <a:noAutofit/>
+          </a:bodyPr>
+          <a:lstStyle/>
+          <a:p>
+            <a:pPr lvl="0" marL="457200" indent="-228600">
+              <a:buFont typeface="Calibri"/>
+              <a:spcAft>
+                <a:spcPts val="1000"/>
+              </a:spcAft>
+              <a:buSzPct val="100000"/>
+              <a:buChar char="•"/>
+              <a:lnSpc>
+                <a:spcPts val="2200"/>
+              </a:lnSpc>
+            </a:pPr>
+            <a:r>
+              <a:rPr sz="2000" b="0">
+                <a:solidFill>
+                  <a:srgbClr val="333333"/>
+                </a:solidFill>
+                <a:latin typeface="Calibri"/>
+              </a:rPr>
+              <a:t>Implement moduleAreaSum, outlineArea, deadspace, and density</a:t>
+            </a:r>
+          </a:p>
+          <a:p>
+            <a:pPr lvl="0" marL="457200" indent="-228600">
+              <a:buFont typeface="Calibri"/>
+              <a:spcAft>
+                <a:spcPts val="1000"/>
+              </a:spcAft>
+              <a:buSzPct val="100000"/>
+              <a:buChar char="•"/>
+              <a:lnSpc>
+                <a:spcPts val="2200"/>
+              </a:lnSpc>
+            </a:pPr>
+            <a:r>
+              <a:rPr sz="2000" b="0">
+                <a:solidFill>
+                  <a:srgbClr val="333333"/>
+                </a:solidFill>
+                <a:latin typeface="Calibri"/>
+              </a:rPr>
+              <a:t>Assert deadspace equals eighty minus twenty-three on the starter modules</a:t>
+            </a:r>
+          </a:p>
+        </p:txBody>
+      </p:sp>
+      <p:sp>
+        <p:nvSpPr>
+          <p:cNvPr id="4" name="TextBox 3"/>
+          <p:cNvSpPr txBox="1"/>
+          <p:nvPr/>
+        </p:nvSpPr>
+        <p:spPr>
+          <a:xfrm>
+            <a:off x="548640" y="6355080"/>
+            <a:ext cx="11064240" cy="320040"/>
+          </a:xfrm>
+          <a:prstGeom prst="rect">
+            <a:avLst/>
+          </a:prstGeom>
+          <a:noFill/>
+        </p:spPr>
+        <p:txBody>
+          <a:bodyPr wrap="square">
+            <a:noAutofit/>
+          </a:bodyPr>
+          <a:lstStyle/>
+          <a:p>
+            <a:pPr algn="r">
+              <a:lnSpc>
+                <a:spcPts val="2200"/>
+              </a:lnSpc>
+              <a:defRPr sz="1000" b="0">
+                <a:solidFill>
+                  <a:srgbClr val="666666"/>
+                </a:solidFill>
+                <a:latin typeface="Calibri"/>
+              </a:defRPr>
+            </a:pPr>
+            <a:r>
+              <a:t>learn_floorplanning — 03 area deadspace</a:t>
+            </a:r>
+          </a:p>
+        </p:txBody>
+      </p:sp>
+    </p:spTree>
+  </p:cSld>
+  <p:clrMapOvr>
+    <a:masterClrMapping/>
+  </p:clrMapOvr>
+</p:sld>
+</file>
+
+<file path=ppt/slides/slide12.xml><?xml version="1.0" encoding="utf-8"?>
+<p:sld xmlns:a="http://schemas.openxmlformats.org/drawingml/2006/main" xmlns:p="http://schemas.openxmlformats.org/presentationml/2006/main" xmlns:r="http://schemas.openxmlformats.org/officeDocument/2006/relationships">
+  <p:cSld>
+    <p:spTree>
+      <p:nvGrpSpPr>
+        <p:cNvPr id="1" name=""/>
+        <p:cNvGrpSpPr/>
+        <p:nvPr/>
+      </p:nvGrpSpPr>
+      <p:grpSpPr/>
+      <p:sp>
+        <p:nvSpPr>
+          <p:cNvPr id="2" name="TextBox 1"/>
+          <p:cNvSpPr txBox="1"/>
+          <p:nvPr/>
+        </p:nvSpPr>
+        <p:spPr>
+          <a:xfrm>
+            <a:off x="548640" y="411480"/>
+            <a:ext cx="11064240" cy="777240"/>
+          </a:xfrm>
+          <a:prstGeom prst="rect">
+            <a:avLst/>
+          </a:prstGeom>
+          <a:noFill/>
+        </p:spPr>
+        <p:txBody>
+          <a:bodyPr wrap="square">
+            <a:noAutofit/>
+          </a:bodyPr>
+          <a:lstStyle/>
+          <a:p>
+            <a:pPr>
+              <a:lnSpc>
+                <a:spcPts val="2200"/>
+              </a:lnSpc>
+            </a:pPr>
+            <a:r>
+              <a:rPr sz="2800" b="1">
+                <a:solidFill>
+                  <a:srgbClr val="1A1A2E"/>
+                </a:solidFill>
+                <a:latin typeface="Calibri"/>
+              </a:rPr>
+              <a:t>Pitfalls</a:t>
+            </a:r>
+          </a:p>
+        </p:txBody>
+      </p:sp>
+      <p:sp>
+        <p:nvSpPr>
+          <p:cNvPr id="3" name="TextBox 2"/>
+          <p:cNvSpPr txBox="1"/>
+          <p:nvPr/>
+        </p:nvSpPr>
+        <p:spPr>
+          <a:xfrm>
+            <a:off x="548640" y="1234440"/>
+            <a:ext cx="11064240" cy="4937760"/>
+          </a:xfrm>
+          <a:prstGeom prst="rect">
+            <a:avLst/>
+          </a:prstGeom>
+          <a:noFill/>
+        </p:spPr>
+        <p:txBody>
+          <a:bodyPr wrap="square">
+            <a:noAutofit/>
+          </a:bodyPr>
+          <a:lstStyle/>
+          <a:p>
+            <a:pPr lvl="0" marL="457200" indent="-228600">
+              <a:buFont typeface="Calibri"/>
+              <a:spcAft>
+                <a:spcPts val="1000"/>
+              </a:spcAft>
+              <a:buSzPct val="100000"/>
+              <a:buChar char="•"/>
+              <a:lnSpc>
+                <a:spcPts val="2200"/>
+              </a:lnSpc>
+            </a:pPr>
+            <a:r>
+              <a:rPr sz="2000" b="0">
+                <a:solidFill>
+                  <a:srgbClr val="333333"/>
+                </a:solidFill>
+                <a:latin typeface="Calibri"/>
+              </a:rPr>
+              <a:t>Reporting density on an illegal pack</a:t>
+            </a:r>
+          </a:p>
+        </p:txBody>
+      </p:sp>
+      <p:sp>
+        <p:nvSpPr>
+          <p:cNvPr id="4" name="TextBox 3"/>
+          <p:cNvSpPr txBox="1"/>
+          <p:nvPr/>
+        </p:nvSpPr>
+        <p:spPr>
+          <a:xfrm>
+            <a:off x="548640" y="6355080"/>
+            <a:ext cx="11064240" cy="320040"/>
+          </a:xfrm>
+          <a:prstGeom prst="rect">
+            <a:avLst/>
+          </a:prstGeom>
+          <a:noFill/>
+        </p:spPr>
+        <p:txBody>
+          <a:bodyPr wrap="square">
+            <a:noAutofit/>
+          </a:bodyPr>
+          <a:lstStyle/>
+          <a:p>
+            <a:pPr algn="r">
+              <a:lnSpc>
+                <a:spcPts val="2200"/>
+              </a:lnSpc>
+              <a:defRPr sz="1000" b="0">
+                <a:solidFill>
+                  <a:srgbClr val="666666"/>
+                </a:solidFill>
+                <a:latin typeface="Calibri"/>
+              </a:defRPr>
+            </a:pPr>
+            <a:r>
+              <a:t>learn_floorplanning — 03 area deadspace</a:t>
+            </a:r>
+          </a:p>
+        </p:txBody>
+      </p:sp>
+    </p:spTree>
+  </p:cSld>
+  <p:clrMapOvr>
+    <a:masterClrMapping/>
+  </p:clrMapOvr>
+</p:sld>
+</file>
+
+<file path=ppt/slides/slide13.xml><?xml version="1.0" encoding="utf-8"?>
+<p:sld xmlns:a="http://schemas.openxmlformats.org/drawingml/2006/main" xmlns:p="http://schemas.openxmlformats.org/presentationml/2006/main" xmlns:r="http://schemas.openxmlformats.org/officeDocument/2006/relationships">
+  <p:cSld>
+    <p:spTree>
+      <p:nvGrpSpPr>
+        <p:cNvPr id="1" name=""/>
+        <p:cNvGrpSpPr/>
+        <p:nvPr/>
+      </p:nvGrpSpPr>
+      <p:grpSpPr/>
+      <p:sp>
+        <p:nvSpPr>
+          <p:cNvPr id="2" name="TextBox 1"/>
+          <p:cNvSpPr txBox="1"/>
+          <p:nvPr/>
+        </p:nvSpPr>
+        <p:spPr>
+          <a:xfrm>
+            <a:off x="548640" y="411480"/>
+            <a:ext cx="11064240" cy="777240"/>
+          </a:xfrm>
+          <a:prstGeom prst="rect">
+            <a:avLst/>
+          </a:prstGeom>
+          <a:noFill/>
+        </p:spPr>
+        <p:txBody>
+          <a:bodyPr wrap="square">
+            <a:noAutofit/>
+          </a:bodyPr>
+          <a:lstStyle/>
+          <a:p>
+            <a:pPr>
+              <a:lnSpc>
+                <a:spcPts val="2200"/>
+              </a:lnSpc>
+            </a:pPr>
+            <a:r>
+              <a:rPr sz="2800" b="1">
+                <a:solidFill>
+                  <a:srgbClr val="1A1A2E"/>
+                </a:solidFill>
+                <a:latin typeface="Calibri"/>
+              </a:rPr>
               <a:t>Your turn</a:t>
             </a:r>
           </a:p>
@@ -4474,45 +5056,21 @@
                 </a:solidFill>
                 <a:latin typeface="Calibri"/>
               </a:rPr>
-              <a:t>Module areas sum to 23</a:t>
-            </a:r>
-          </a:p>
-        </p:txBody>
-      </p:sp>
-      <p:pic>
-        <p:nvPicPr>
-          <p:cNvPr id="3" name="Picture 2" descr="01-areas.png"/>
-          <p:cNvPicPr>
-            <a:picLocks noChangeAspect="1"/>
-          </p:cNvPicPr>
-          <p:nvPr/>
-        </p:nvPicPr>
-        <p:blipFill>
-          <a:blip r:embed="rId2"/>
-          <a:stretch>
-            <a:fillRect/>
-          </a:stretch>
-        </p:blipFill>
-        <p:spPr>
-          <a:xfrm>
-            <a:off x="548640" y="1143000"/>
-            <a:ext cx="9262241" cy="4572000"/>
-          </a:xfrm>
-          <a:prstGeom prst="rect">
-            <a:avLst/>
-          </a:prstGeom>
-        </p:spPr>
-      </p:pic>
-      <p:sp>
-        <p:nvSpPr>
-          <p:cNvPr id="4" name="TextBox 3"/>
+              <a:t>Pseudocode</a:t>
+            </a:r>
+          </a:p>
+        </p:txBody>
+      </p:sp>
+      <p:sp>
+        <p:nvSpPr>
+          <p:cNvPr id="3" name="TextBox 2"/>
           <p:cNvSpPr txBox="1"/>
           <p:nvPr/>
         </p:nvSpPr>
         <p:spPr>
           <a:xfrm>
-            <a:off x="548640" y="5897880"/>
-            <a:ext cx="11064240" cy="411480"/>
+            <a:off x="548640" y="1234440"/>
+            <a:ext cx="11064240" cy="4937760"/>
           </a:xfrm>
           <a:prstGeom prst="rect">
             <a:avLst/>
@@ -4525,26 +5083,98 @@
           </a:bodyPr>
           <a:lstStyle/>
           <a:p>
-            <a:pPr>
+            <a:pPr lvl="0" marL="457200" indent="-228600">
+              <a:buFont typeface="Calibri"/>
+              <a:spcAft>
+                <a:spcPts val="1000"/>
+              </a:spcAft>
+              <a:buSzPct val="100000"/>
+              <a:buChar char="•"/>
               <a:lnSpc>
                 <a:spcPts val="2200"/>
               </a:lnSpc>
             </a:pPr>
             <a:r>
-              <a:rPr sz="1200" b="0">
+              <a:rPr sz="2000" b="0">
                 <a:solidFill>
                   <a:srgbClr val="333333"/>
                 </a:solidFill>
                 <a:latin typeface="Calibri"/>
               </a:rPr>
-              <a:t>Module areas sum to 23</a:t>
-            </a:r>
-          </a:p>
-        </p:txBody>
-      </p:sp>
-      <p:sp>
-        <p:nvSpPr>
-          <p:cNvPr id="5" name="TextBox 4"/>
+              <a:t>Deadspace pseudocode is arithmetic after legality</a:t>
+            </a:r>
+          </a:p>
+          <a:p>
+            <a:pPr lvl="0" marL="457200" indent="-228600">
+              <a:buFont typeface="Calibri"/>
+              <a:spcAft>
+                <a:spcPts val="1000"/>
+              </a:spcAft>
+              <a:buSzPct val="100000"/>
+              <a:buChar char="•"/>
+              <a:lnSpc>
+                <a:spcPts val="2200"/>
+              </a:lnSpc>
+            </a:pPr>
+            <a:r>
+              <a:rPr sz="2000" b="0">
+                <a:solidFill>
+                  <a:srgbClr val="333333"/>
+                </a:solidFill>
+                <a:latin typeface="Calibri"/>
+              </a:rPr>
+              <a:t>Sum module areas, subtract from outline area, and divide for density</a:t>
+            </a:r>
+          </a:p>
+          <a:p>
+            <a:pPr lvl="0" marL="457200" indent="-228600">
+              <a:buFont typeface="Calibri"/>
+              <a:spcAft>
+                <a:spcPts val="1000"/>
+              </a:spcAft>
+              <a:buSzPct val="100000"/>
+              <a:buChar char="•"/>
+              <a:lnSpc>
+                <a:spcPts val="2200"/>
+              </a:lnSpc>
+            </a:pPr>
+            <a:r>
+              <a:rPr sz="2000" b="0">
+                <a:solidFill>
+                  <a:srgbClr val="333333"/>
+                </a:solidFill>
+                <a:latin typeface="Calibri"/>
+              </a:rPr>
+              <a:t>Open this module's examples file and find the Pseudocode section</a:t>
+            </a:r>
+          </a:p>
+          <a:p>
+            <a:pPr lvl="0" marL="457200" indent="-228600">
+              <a:buFont typeface="Calibri"/>
+              <a:spcAft>
+                <a:spcPts val="1000"/>
+              </a:spcAft>
+              <a:buSzPct val="100000"/>
+              <a:buChar char="•"/>
+              <a:lnSpc>
+                <a:spcPts val="2200"/>
+              </a:lnSpc>
+            </a:pPr>
+            <a:r>
+              <a:rPr sz="2000" b="0">
+                <a:solidFill>
+                  <a:srgbClr val="333333"/>
+                </a:solidFill>
+                <a:latin typeface="Calibri"/>
+              </a:rPr>
+              <a:t>That written sketch is what you implement on the implement track and what the browser</a:t>
+            </a:r>
+          </a:p>
+        </p:txBody>
+      </p:sp>
+      <p:sp>
+        <p:nvSpPr>
+          <p:cNvPr id="4" name="TextBox 3"/>
           <p:cNvSpPr txBox="1"/>
           <p:nvPr/>
         </p:nvSpPr>
@@ -4633,45 +5263,21 @@
                 </a:solidFill>
                 <a:latin typeface="Calibri"/>
               </a:rPr>
-              <a:t>Outline area is 80</a:t>
-            </a:r>
-          </a:p>
-        </p:txBody>
-      </p:sp>
-      <p:pic>
-        <p:nvPicPr>
-          <p:cNvPr id="3" name="Picture 2" descr="02-outline-area.png"/>
-          <p:cNvPicPr>
-            <a:picLocks noChangeAspect="1"/>
-          </p:cNvPicPr>
-          <p:nvPr/>
-        </p:nvPicPr>
-        <p:blipFill>
-          <a:blip r:embed="rId2"/>
-          <a:stretch>
-            <a:fillRect/>
-          </a:stretch>
-        </p:blipFill>
-        <p:spPr>
-          <a:xfrm>
-            <a:off x="548640" y="1143000"/>
-            <a:ext cx="9424736" cy="4572000"/>
-          </a:xfrm>
-          <a:prstGeom prst="rect">
-            <a:avLst/>
-          </a:prstGeom>
-        </p:spPr>
-      </p:pic>
-      <p:sp>
-        <p:nvSpPr>
-          <p:cNvPr id="4" name="TextBox 3"/>
+              <a:t>Algorithm sketch</a:t>
+            </a:r>
+          </a:p>
+        </p:txBody>
+      </p:sp>
+      <p:sp>
+        <p:nvSpPr>
+          <p:cNvPr id="3" name="TextBox 2"/>
           <p:cNvSpPr txBox="1"/>
           <p:nvPr/>
         </p:nvSpPr>
         <p:spPr>
           <a:xfrm>
-            <a:off x="548640" y="5897880"/>
-            <a:ext cx="11064240" cy="411480"/>
+            <a:off x="548640" y="1234440"/>
+            <a:ext cx="11064240" cy="4937760"/>
           </a:xfrm>
           <a:prstGeom prst="rect">
             <a:avLst/>
@@ -4684,26 +5290,54 @@
           </a:bodyPr>
           <a:lstStyle/>
           <a:p>
-            <a:pPr>
+            <a:pPr lvl="0" marL="457200" indent="-228600">
+              <a:buFont typeface="Calibri"/>
+              <a:spcAft>
+                <a:spcPts val="1000"/>
+              </a:spcAft>
+              <a:buSzPct val="100000"/>
+              <a:buChar char="•"/>
               <a:lnSpc>
                 <a:spcPts val="2200"/>
               </a:lnSpc>
             </a:pPr>
             <a:r>
-              <a:rPr sz="1200" b="0">
+              <a:rPr sz="2000" b="0">
                 <a:solidFill>
                   <a:srgbClr val="333333"/>
                 </a:solidFill>
                 <a:latin typeface="Calibri"/>
               </a:rPr>
-              <a:t>Outline area is 80</a:t>
-            </a:r>
-          </a:p>
-        </p:txBody>
-      </p:sp>
-      <p:sp>
-        <p:nvSpPr>
-          <p:cNvPr id="5" name="TextBox 4"/>
+              <a:t>On the golden packing area is twenty-three</a:t>
+            </a:r>
+          </a:p>
+          <a:p>
+            <a:pPr lvl="0" marL="457200" indent="-228600">
+              <a:buFont typeface="Calibri"/>
+              <a:spcAft>
+                <a:spcPts val="1000"/>
+              </a:spcAft>
+              <a:buSzPct val="100000"/>
+              <a:buChar char="•"/>
+              <a:lnSpc>
+                <a:spcPts val="2200"/>
+              </a:lnSpc>
+            </a:pPr>
+            <a:r>
+              <a:rPr sz="2000" b="0">
+                <a:solidFill>
+                  <a:srgbClr val="333333"/>
+                </a:solidFill>
+                <a:latin typeface="Calibri"/>
+              </a:rPr>
+              <a:t>Do not celebrate density on illegal packs</a:t>
+            </a:r>
+          </a:p>
+        </p:txBody>
+      </p:sp>
+      <p:sp>
+        <p:nvSpPr>
+          <p:cNvPr id="4" name="TextBox 3"/>
           <p:cNvSpPr txBox="1"/>
           <p:nvPr/>
         </p:nvSpPr>
@@ -4792,50 +5426,28 @@
                 </a:solidFill>
                 <a:latin typeface="Calibri"/>
               </a:rPr>
-              <a:t>Density is 0.2875</a:t>
-            </a:r>
-          </a:p>
-        </p:txBody>
-      </p:sp>
-      <p:pic>
-        <p:nvPicPr>
-          <p:cNvPr id="3" name="Picture 2" descr="03-density.png"/>
-          <p:cNvPicPr>
-            <a:picLocks noChangeAspect="1"/>
-          </p:cNvPicPr>
+              <a:t>Algorithm sketch — try these</a:t>
+            </a:r>
+          </a:p>
+        </p:txBody>
+      </p:sp>
+      <p:sp>
+        <p:nvSpPr>
+          <p:cNvPr id="3" name="TextBox 2"/>
+          <p:cNvSpPr txBox="1"/>
           <p:nvPr/>
-        </p:nvPicPr>
-        <p:blipFill>
-          <a:blip r:embed="rId2"/>
-          <a:stretch>
-            <a:fillRect/>
-          </a:stretch>
-        </p:blipFill>
+        </p:nvSpPr>
         <p:spPr>
           <a:xfrm>
             <a:off x="548640" y="1143000"/>
-            <a:ext cx="9424736" cy="4572000"/>
+            <a:ext cx="11064240" cy="5029200"/>
           </a:xfrm>
           <a:prstGeom prst="rect">
             <a:avLst/>
           </a:prstGeom>
-        </p:spPr>
-      </p:pic>
-      <p:sp>
-        <p:nvSpPr>
-          <p:cNvPr id="4" name="TextBox 3"/>
-          <p:cNvSpPr txBox="1"/>
-          <p:nvPr/>
-        </p:nvSpPr>
-        <p:spPr>
-          <a:xfrm>
-            <a:off x="548640" y="5897880"/>
-            <a:ext cx="11064240" cy="411480"/>
-          </a:xfrm>
-          <a:prstGeom prst="rect">
-            <a:avLst/>
-          </a:prstGeom>
-          <a:noFill/>
+          <a:solidFill>
+            <a:srgbClr val="F4F4F4"/>
+          </a:solidFill>
         </p:spPr>
         <p:txBody>
           <a:bodyPr wrap="square">
@@ -4847,22 +5459,158 @@
               <a:lnSpc>
                 <a:spcPts val="2200"/>
               </a:lnSpc>
+              <a:spcAft>
+                <a:spcPts val="400"/>
+              </a:spcAft>
             </a:pPr>
             <a:r>
-              <a:rPr sz="1200" b="0">
+              <a:rPr sz="2000" b="0">
                 <a:solidFill>
                   <a:srgbClr val="333333"/>
                 </a:solidFill>
-                <a:latin typeface="Calibri"/>
+                <a:latin typeface="Consolas"/>
               </a:rPr>
-              <a:t>Density is 0.2875</a:t>
-            </a:r>
-          </a:p>
-        </p:txBody>
-      </p:sp>
-      <p:sp>
-        <p:nvSpPr>
-          <p:cNvPr id="5" name="TextBox 4"/>
+              <a:t>INPUT: outline W×H, modules areas</a:t>
+            </a:r>
+          </a:p>
+          <a:p>
+            <a:pPr>
+              <a:lnSpc>
+                <a:spcPts val="2200"/>
+              </a:lnSpc>
+              <a:spcAft>
+                <a:spcPts val="400"/>
+              </a:spcAft>
+            </a:pPr>
+            <a:r>
+              <a:rPr sz="2000" b="0">
+                <a:solidFill>
+                  <a:srgbClr val="333333"/>
+                </a:solidFill>
+                <a:latin typeface="Consolas"/>
+              </a:rPr>
+              <a:t>OUTPUT: area_sum, deadspace, density</a:t>
+            </a:r>
+          </a:p>
+          <a:p>
+            <a:pPr>
+              <a:lnSpc>
+                <a:spcPts val="2200"/>
+              </a:lnSpc>
+              <a:spcAft>
+                <a:spcPts val="400"/>
+              </a:spcAft>
+            </a:pPr>
+            <a:r>
+              <a:rPr sz="2000" b="0">
+                <a:solidFill>
+                  <a:srgbClr val="333333"/>
+                </a:solidFill>
+                <a:latin typeface="Consolas"/>
+              </a:rPr>
+              <a:t>area_sum ← Σ w[m]·h[m]</a:t>
+            </a:r>
+          </a:p>
+          <a:p>
+            <a:pPr>
+              <a:lnSpc>
+                <a:spcPts val="2200"/>
+              </a:lnSpc>
+              <a:spcAft>
+                <a:spcPts val="400"/>
+              </a:spcAft>
+            </a:pPr>
+            <a:r>
+              <a:rPr sz="2000" b="0">
+                <a:solidFill>
+                  <a:srgbClr val="333333"/>
+                </a:solidFill>
+                <a:latin typeface="Consolas"/>
+              </a:rPr>
+              <a:t>deadspace ← W·H − area_sum</a:t>
+            </a:r>
+          </a:p>
+          <a:p>
+            <a:pPr>
+              <a:lnSpc>
+                <a:spcPts val="2200"/>
+              </a:lnSpc>
+              <a:spcAft>
+                <a:spcPts val="400"/>
+              </a:spcAft>
+            </a:pPr>
+            <a:r>
+              <a:rPr sz="2000" b="0">
+                <a:solidFill>
+                  <a:srgbClr val="333333"/>
+                </a:solidFill>
+                <a:latin typeface="Consolas"/>
+              </a:rPr>
+              <a:t>density ← area_sum / (W·H)</a:t>
+            </a:r>
+          </a:p>
+          <a:p>
+            <a:pPr>
+              <a:lnSpc>
+                <a:spcPts val="2200"/>
+              </a:lnSpc>
+              <a:spcAft>
+                <a:spcPts val="400"/>
+              </a:spcAft>
+            </a:pPr>
+            <a:r>
+              <a:rPr sz="2000" b="0">
+                <a:solidFill>
+                  <a:srgbClr val="333333"/>
+                </a:solidFill>
+                <a:latin typeface="Consolas"/>
+              </a:rPr>
+              <a:t>only report density on legal packs</a:t>
+            </a:r>
+          </a:p>
+          <a:p>
+            <a:pPr>
+              <a:lnSpc>
+                <a:spcPts val="2200"/>
+              </a:lnSpc>
+              <a:spcAft>
+                <a:spcPts val="400"/>
+              </a:spcAft>
+            </a:pPr>
+            <a:r>
+              <a:rPr sz="2000" b="0">
+                <a:solidFill>
+                  <a:srgbClr val="333333"/>
+                </a:solidFill>
+                <a:latin typeface="Consolas"/>
+              </a:rPr>
+              <a:t>GOLDEN: area=23; outline=80; dead=57</a:t>
+            </a:r>
+          </a:p>
+          <a:p>
+            <a:pPr>
+              <a:lnSpc>
+                <a:spcPts val="2200"/>
+              </a:lnSpc>
+              <a:spcAft>
+                <a:spcPts val="400"/>
+              </a:spcAft>
+            </a:pPr>
+            <a:r>
+              <a:rPr sz="2000" b="0">
+                <a:solidFill>
+                  <a:srgbClr val="333333"/>
+                </a:solidFill>
+                <a:latin typeface="Consolas"/>
+              </a:rPr>
+              <a:t>density=0.2875</a:t>
+            </a:r>
+          </a:p>
+        </p:txBody>
+      </p:sp>
+      <p:sp>
+        <p:nvSpPr>
+          <p:cNvPr id="4" name="TextBox 3"/>
           <p:cNvSpPr txBox="1"/>
           <p:nvPr/>
         </p:nvSpPr>
@@ -4951,14 +5699,14 @@
                 </a:solidFill>
                 <a:latin typeface="Calibri"/>
               </a:rPr>
-              <a:t>Metrics need a legal pack</a:t>
+              <a:t>Module areas sum to 23</a:t>
             </a:r>
           </a:p>
         </p:txBody>
       </p:sp>
       <p:pic>
         <p:nvPicPr>
-          <p:cNvPr id="3" name="Picture 2" descr="04-legal-metrics.png"/>
+          <p:cNvPr id="3" name="Picture 2" descr="01-areas.png"/>
           <p:cNvPicPr>
             <a:picLocks noChangeAspect="1"/>
           </p:cNvPicPr>
@@ -4973,7 +5721,7 @@
         <p:spPr>
           <a:xfrm>
             <a:off x="548640" y="1143000"/>
-            <a:ext cx="9222489" cy="4572000"/>
+            <a:ext cx="9262241" cy="4572000"/>
           </a:xfrm>
           <a:prstGeom prst="rect">
             <a:avLst/>
@@ -5014,7 +5762,7 @@
                 </a:solidFill>
                 <a:latin typeface="Calibri"/>
               </a:rPr>
-              <a:t>Metrics need a legal pack</a:t>
+              <a:t>Module areas sum to 23</a:t>
             </a:r>
           </a:p>
         </p:txBody>
@@ -5110,14 +5858,14 @@
                 </a:solidFill>
                 <a:latin typeface="Calibri"/>
               </a:rPr>
-              <a:t>Report area trio every time</a:t>
+              <a:t>Outline area is 80</a:t>
             </a:r>
           </a:p>
         </p:txBody>
       </p:sp>
       <p:pic>
         <p:nvPicPr>
-          <p:cNvPr id="3" name="Picture 2" descr="05-takeaway.png"/>
+          <p:cNvPr id="3" name="Picture 2" descr="02-outline-area.png"/>
           <p:cNvPicPr>
             <a:picLocks noChangeAspect="1"/>
           </p:cNvPicPr>
@@ -5173,7 +5921,7 @@
                 </a:solidFill>
                 <a:latin typeface="Calibri"/>
               </a:rPr>
-              <a:t>Report area trio every time</a:t>
+              <a:t>Outline area is 80</a:t>
             </a:r>
           </a:p>
         </p:txBody>
@@ -5269,21 +6017,45 @@
                 </a:solidFill>
                 <a:latin typeface="Calibri"/>
               </a:rPr>
-              <a:t>Browser lab track</a:t>
-            </a:r>
-          </a:p>
-        </p:txBody>
-      </p:sp>
-      <p:sp>
-        <p:nvSpPr>
-          <p:cNvPr id="3" name="TextBox 2"/>
+              <a:t>Density is 0.2875</a:t>
+            </a:r>
+          </a:p>
+        </p:txBody>
+      </p:sp>
+      <p:pic>
+        <p:nvPicPr>
+          <p:cNvPr id="3" name="Picture 2" descr="03-density.png"/>
+          <p:cNvPicPr>
+            <a:picLocks noChangeAspect="1"/>
+          </p:cNvPicPr>
+          <p:nvPr/>
+        </p:nvPicPr>
+        <p:blipFill>
+          <a:blip r:embed="rId2"/>
+          <a:stretch>
+            <a:fillRect/>
+          </a:stretch>
+        </p:blipFill>
+        <p:spPr>
+          <a:xfrm>
+            <a:off x="548640" y="1143000"/>
+            <a:ext cx="9424736" cy="4572000"/>
+          </a:xfrm>
+          <a:prstGeom prst="rect">
+            <a:avLst/>
+          </a:prstGeom>
+        </p:spPr>
+      </p:pic>
+      <p:sp>
+        <p:nvSpPr>
+          <p:cNvPr id="4" name="TextBox 3"/>
           <p:cNvSpPr txBox="1"/>
           <p:nvPr/>
         </p:nvSpPr>
         <p:spPr>
           <a:xfrm>
-            <a:off x="548640" y="1234440"/>
-            <a:ext cx="11064240" cy="4937760"/>
+            <a:off x="548640" y="5897880"/>
+            <a:ext cx="11064240" cy="411480"/>
           </a:xfrm>
           <a:prstGeom prst="rect">
             <a:avLst/>
@@ -5296,32 +6068,26 @@
           </a:bodyPr>
           <a:lstStyle/>
           <a:p>
-            <a:pPr lvl="0" marL="457200" indent="-228600">
-              <a:buFont typeface="Calibri"/>
-              <a:spcAft>
-                <a:spcPts val="1000"/>
-              </a:spcAft>
-              <a:buSzPct val="100000"/>
-              <a:buChar char="•"/>
+            <a:pPr>
               <a:lnSpc>
                 <a:spcPts val="2200"/>
               </a:lnSpc>
             </a:pPr>
             <a:r>
-              <a:rPr sz="2000" b="0">
+              <a:rPr sz="1200" b="0">
                 <a:solidFill>
                   <a:srgbClr val="333333"/>
                 </a:solidFill>
                 <a:latin typeface="Calibri"/>
               </a:rPr>
-              <a:t>Open area-deadspace, load the golden packing, and read the metrics panel</a:t>
-            </a:r>
-          </a:p>
-        </p:txBody>
-      </p:sp>
-      <p:sp>
-        <p:nvSpPr>
-          <p:cNvPr id="4" name="TextBox 3"/>
+              <a:t>Density is 0.2875</a:t>
+            </a:r>
+          </a:p>
+        </p:txBody>
+      </p:sp>
+      <p:sp>
+        <p:nvSpPr>
+          <p:cNvPr id="5" name="TextBox 4"/>
           <p:cNvSpPr txBox="1"/>
           <p:nvPr/>
         </p:nvSpPr>
@@ -5410,21 +6176,45 @@
                 </a:solidFill>
                 <a:latin typeface="Calibri"/>
               </a:rPr>
-              <a:t>Implement track</a:t>
-            </a:r>
-          </a:p>
-        </p:txBody>
-      </p:sp>
-      <p:sp>
-        <p:nvSpPr>
-          <p:cNvPr id="3" name="TextBox 2"/>
+              <a:t>Metrics need a legal pack</a:t>
+            </a:r>
+          </a:p>
+        </p:txBody>
+      </p:sp>
+      <p:pic>
+        <p:nvPicPr>
+          <p:cNvPr id="3" name="Picture 2" descr="04-legal-metrics.png"/>
+          <p:cNvPicPr>
+            <a:picLocks noChangeAspect="1"/>
+          </p:cNvPicPr>
+          <p:nvPr/>
+        </p:nvPicPr>
+        <p:blipFill>
+          <a:blip r:embed="rId2"/>
+          <a:stretch>
+            <a:fillRect/>
+          </a:stretch>
+        </p:blipFill>
+        <p:spPr>
+          <a:xfrm>
+            <a:off x="548640" y="1143000"/>
+            <a:ext cx="9222489" cy="4572000"/>
+          </a:xfrm>
+          <a:prstGeom prst="rect">
+            <a:avLst/>
+          </a:prstGeom>
+        </p:spPr>
+      </p:pic>
+      <p:sp>
+        <p:nvSpPr>
+          <p:cNvPr id="4" name="TextBox 3"/>
           <p:cNvSpPr txBox="1"/>
           <p:nvPr/>
         </p:nvSpPr>
         <p:spPr>
           <a:xfrm>
-            <a:off x="548640" y="1234440"/>
-            <a:ext cx="11064240" cy="4937760"/>
+            <a:off x="548640" y="5897880"/>
+            <a:ext cx="11064240" cy="411480"/>
           </a:xfrm>
           <a:prstGeom prst="rect">
             <a:avLst/>
@@ -5437,54 +6227,26 @@
           </a:bodyPr>
           <a:lstStyle/>
           <a:p>
-            <a:pPr lvl="0" marL="457200" indent="-228600">
-              <a:buFont typeface="Calibri"/>
-              <a:spcAft>
-                <a:spcPts val="1000"/>
-              </a:spcAft>
-              <a:buSzPct val="100000"/>
-              <a:buChar char="•"/>
+            <a:pPr>
               <a:lnSpc>
                 <a:spcPts val="2200"/>
               </a:lnSpc>
             </a:pPr>
             <a:r>
-              <a:rPr sz="2000" b="0">
+              <a:rPr sz="1200" b="0">
                 <a:solidFill>
                   <a:srgbClr val="333333"/>
                 </a:solidFill>
                 <a:latin typeface="Calibri"/>
               </a:rPr>
-              <a:t>Implement moduleAreaSum, outlineArea, deadspace, and density</a:t>
-            </a:r>
-          </a:p>
-          <a:p>
-            <a:pPr lvl="0" marL="457200" indent="-228600">
-              <a:buFont typeface="Calibri"/>
-              <a:spcAft>
-                <a:spcPts val="1000"/>
-              </a:spcAft>
-              <a:buSzPct val="100000"/>
-              <a:buChar char="•"/>
-              <a:lnSpc>
-                <a:spcPts val="2200"/>
-              </a:lnSpc>
-            </a:pPr>
-            <a:r>
-              <a:rPr sz="2000" b="0">
-                <a:solidFill>
-                  <a:srgbClr val="333333"/>
-                </a:solidFill>
-                <a:latin typeface="Calibri"/>
-              </a:rPr>
-              <a:t>Assert deadspace equals eighty minus twenty-three on the starter modules</a:t>
-            </a:r>
-          </a:p>
-        </p:txBody>
-      </p:sp>
-      <p:sp>
-        <p:nvSpPr>
-          <p:cNvPr id="4" name="TextBox 3"/>
+              <a:t>Metrics need a legal pack</a:t>
+            </a:r>
+          </a:p>
+        </p:txBody>
+      </p:sp>
+      <p:sp>
+        <p:nvSpPr>
+          <p:cNvPr id="5" name="TextBox 4"/>
           <p:cNvSpPr txBox="1"/>
           <p:nvPr/>
         </p:nvSpPr>
@@ -5573,21 +6335,45 @@
                 </a:solidFill>
                 <a:latin typeface="Calibri"/>
               </a:rPr>
-              <a:t>Pitfalls</a:t>
-            </a:r>
-          </a:p>
-        </p:txBody>
-      </p:sp>
-      <p:sp>
-        <p:nvSpPr>
-          <p:cNvPr id="3" name="TextBox 2"/>
+              <a:t>Report area trio every time</a:t>
+            </a:r>
+          </a:p>
+        </p:txBody>
+      </p:sp>
+      <p:pic>
+        <p:nvPicPr>
+          <p:cNvPr id="3" name="Picture 2" descr="05-takeaway.png"/>
+          <p:cNvPicPr>
+            <a:picLocks noChangeAspect="1"/>
+          </p:cNvPicPr>
+          <p:nvPr/>
+        </p:nvPicPr>
+        <p:blipFill>
+          <a:blip r:embed="rId2"/>
+          <a:stretch>
+            <a:fillRect/>
+          </a:stretch>
+        </p:blipFill>
+        <p:spPr>
+          <a:xfrm>
+            <a:off x="548640" y="1143000"/>
+            <a:ext cx="9424736" cy="4572000"/>
+          </a:xfrm>
+          <a:prstGeom prst="rect">
+            <a:avLst/>
+          </a:prstGeom>
+        </p:spPr>
+      </p:pic>
+      <p:sp>
+        <p:nvSpPr>
+          <p:cNvPr id="4" name="TextBox 3"/>
           <p:cNvSpPr txBox="1"/>
           <p:nvPr/>
         </p:nvSpPr>
         <p:spPr>
           <a:xfrm>
-            <a:off x="548640" y="1234440"/>
-            <a:ext cx="11064240" cy="4937760"/>
+            <a:off x="548640" y="5897880"/>
+            <a:ext cx="11064240" cy="411480"/>
           </a:xfrm>
           <a:prstGeom prst="rect">
             <a:avLst/>
@@ -5600,32 +6386,26 @@
           </a:bodyPr>
           <a:lstStyle/>
           <a:p>
-            <a:pPr lvl="0" marL="457200" indent="-228600">
-              <a:buFont typeface="Calibri"/>
-              <a:spcAft>
-                <a:spcPts val="1000"/>
-              </a:spcAft>
-              <a:buSzPct val="100000"/>
-              <a:buChar char="•"/>
+            <a:pPr>
               <a:lnSpc>
                 <a:spcPts val="2200"/>
               </a:lnSpc>
             </a:pPr>
             <a:r>
-              <a:rPr sz="2000" b="0">
+              <a:rPr sz="1200" b="0">
                 <a:solidFill>
                   <a:srgbClr val="333333"/>
                 </a:solidFill>
                 <a:latin typeface="Calibri"/>
               </a:rPr>
-              <a:t>Reporting density on an illegal pack</a:t>
-            </a:r>
-          </a:p>
-        </p:txBody>
-      </p:sp>
-      <p:sp>
-        <p:nvSpPr>
-          <p:cNvPr id="4" name="TextBox 3"/>
+              <a:t>Report area trio every time</a:t>
+            </a:r>
+          </a:p>
+        </p:txBody>
+      </p:sp>
+      <p:sp>
+        <p:nvSpPr>
+          <p:cNvPr id="5" name="TextBox 4"/>
           <p:cNvSpPr txBox="1"/>
           <p:nvPr/>
         </p:nvSpPr>
